--- a/decks/englang-rhetoric/englang-rhetoric_ch1_what-is-rhetoric.pptx
+++ b/decks/englang-rhetoric/englang-rhetoric_ch1_what-is-rhetoric.pptx
@@ -126,29 +126,29 @@
   <p:extLst>
     <p:ext uri="{521415D9-36F7-43E2-AB2F-B90AF26B5E84}">
       <p14:sectionLst xmlns:p14="http://schemas.microsoft.com/office/powerpoint/2010/main">
-        <p14:section name="Opening" id="{86d1f813-e78a-8f5e-b6d2-a550b516e7d3}">
+        <p14:section name="Opening" id="{8accbe64-0347-af68-c524-cdc035e1d71e}">
           <p14:sldIdLst>
             <p14:sldId id="256"/>
           </p14:sldIdLst>
         </p14:section>
-        <p14:section name="Gate" id="{b05ca92a-e354-4978-917b-844f98912744}">
+        <p14:section name="Gate" id="{5e4adc01-1b8a-a959-0029-3291380e5876}">
           <p14:sldIdLst>
             <p14:sldId id="257"/>
             <p14:sldId id="258"/>
           </p14:sldIdLst>
         </p14:section>
-        <p14:section name="Pre-teach" id="{fc3b063c-3cdf-35d9-3491-38a9441ad134}">
+        <p14:section name="Pre-teach" id="{50625ab5-b8b2-4ef2-0514-8c282b7e50ea}">
           <p14:sldIdLst>
             <p14:sldId id="259"/>
           </p14:sldIdLst>
         </p14:section>
-        <p14:section name="Read-along" id="{6d02ea8f-1f2e-1237-3ebf-c8052ed5b923}">
+        <p14:section name="Read-along" id="{a24e1f0c-7129-362d-9afb-7b99648d553e}">
           <p14:sldIdLst>
             <p14:sldId id="260"/>
             <p14:sldId id="261"/>
           </p14:sldIdLst>
         </p14:section>
-        <p14:section name="Teach" id="{a045c422-1dfb-d6f2-b12f-f4e3568f7d35}">
+        <p14:section name="Teach" id="{d7621298-347e-9a6e-5ee4-621d3567160d}">
           <p14:sldIdLst>
             <p14:sldId id="262"/>
             <p14:sldId id="263"/>
@@ -158,7 +158,7 @@
             <p14:sldId id="267"/>
           </p14:sldIdLst>
         </p14:section>
-        <p14:section name="Routes" id="{a8f46684-b816-9328-370b-7793efc38f3e}">
+        <p14:section name="Routes" id="{46c7adf8-f09e-8d17-51aa-c2e77068d6f4}">
           <p14:sldIdLst>
             <p14:sldId id="268"/>
             <p14:sldId id="269"/>
@@ -166,12 +166,12 @@
             <p14:sldId id="271"/>
           </p14:sldIdLst>
         </p14:section>
-        <p14:section name="Close" id="{e7e855e5-e2b9-2649-2853-10bdc66083bb}">
+        <p14:section name="Close" id="{244fd864-26ae-3294-ded1-9c4e484a7cd5}">
           <p14:sldIdLst>
             <p14:sldId id="272"/>
           </p14:sldIdLst>
         </p14:section>
-        <p14:section name="Answers" id="{7f3ba7b3-dd5d-29f3-5765-7076eca089ed}">
+        <p14:section name="Answers" id="{754395ec-d05b-fc86-fb10-a4031b693724}">
           <p14:sldIdLst>
             <p14:sldId id="273"/>
             <p14:sldId id="274"/>
@@ -1326,7 +1326,7 @@
               <a:rPr lang="en-US" dirty="0"/>
               <a:t>Exit ticket — individual, silent, on a slip or mini-whiteboard. Recall before help: no notes, no lanes, no hints. Collect before pupils leave.
 Question: Which city is seen as the birthplace of rhetoric?
-Answer: A   Athens. Athens was a democracy, so men who could persuade the Assembly gained power. That is why rhetoric was studied there first.
+Answer: B   Athens. Athens was a democracy, so men who could persuade the Assembly gained power. That is why rhetoric was studied there first.
 Source of this question: gate item 1 re-asked (options rotated) — this chapter has no third quick-check module.
 The ebook also holds task 3, "How does the captain persuade?", for homework or the next lesson's do now.
 Sort the slips: correct → ready to move on; incorrect → start next lesson in the pre-teach group, with the read-along and the Support lane. Same destination next time.</a:t>
@@ -1509,7 +1509,7 @@
             <a:r>
               <a:rPr lang="en-US" dirty="0"/>
               <a:t>Answers — task 2: Find the ethos. Reveal the answer; pupils mark their own work in a different colour, then read the "why" together. Same destination for every lane, so one answer serves the whole class.
-Answer: A   “I have walked every mile beside you, and my feet are as blistered as yours.”
+Answer: C   “I have walked every mile beside you, and my feet are as blistered as yours.”
 Why: The captain shows she has shared every mile and every blister. That earns her the right to ask for more: ethos.
 Ask a Support pupil to explain one step, and a Stretch pupil to share their extension.</a:t>
             </a:r>
@@ -1600,7 +1600,7 @@
             <a:r>
               <a:rPr lang="en-US" dirty="0"/>
               <a:t>Do now — retrieval. Silent, no notes, no help: recall comes before any support. Give about four minutes.
-1. Which city is seen as the birthplace of rhetoric?  →  B   Athens
+1. Which city is seen as the birthplace of rhetoric?  →  C   Athens
 2. Persuading someone by appealing to their emotions is called ___.  →  pathos
 3. What were the first teachers of rhetoric called?  →  B   Sophists
 Circulate: who gets 3/3 (Stretch route), 2/3 (Core), 0–1 (Support)? Use this to route pupils later in the lesson.</a:t>
@@ -1692,7 +1692,7 @@
             <a:r>
               <a:rPr lang="en-US" dirty="0"/>
               <a:t>Answers — exit ticket: Exit ticket. Reveal the answer; pupils mark their own work in a different colour, then read the "why" together. Same destination for every lane, so one answer serves the whole class.
-Answer: A   Athens
+Answer: B   Athens
 Why: Athens was a democracy, so men who could persuade the Assembly gained power. That is why rhetoric was studied there first.
 Ask a Support pupil to explain one step, and a Stretch pupil to share their extension.</a:t>
             </a:r>
@@ -1783,7 +1783,7 @@
             <a:r>
               <a:rPr lang="en-US" dirty="0"/>
               <a:t>Answers — pupils mark their own in a different colour, then hands up for 3/3, 2/3, 1/3.
-1. B   Athens. Athens was a democracy, so men who could persuade the Assembly gained power. That is why rhetoric was studied there first.
+1. C   Athens. Athens was a democracy, so men who could persuade the Assembly gained power. That is why rhetoric was studied there first.
 2. pathos. Pathos is persuasion through emotion and values.
 3. B   Sophists. The Sophists were the first teachers of rhetoric. Their bad reputation comes from arguing anything for money, even things that were untrue.
 Say the route each score points to: 3/3 Stretch, 2/3 Core, 0–1 Support. Pupils may choose to move up.</a:t>
@@ -8035,7 +8035,7 @@
                 <a:ea typeface="Calibri" pitchFamily="34" charset="-122"/>
                 <a:cs typeface="Calibri" pitchFamily="34" charset="-120"/>
               </a:rPr>
-              <a:t>“I have walked every mile beside you, and my feet are as blistered as yours.”</a:t>
+              <a:t>“The pass ahead is three days away.”</a:t>
             </a:r>
             <a:endParaRPr lang="en-US" sz="2600" dirty="0"/>
           </a:p>
@@ -8072,7 +8072,7 @@
                 <a:ea typeface="Calibri" pitchFamily="34" charset="-122"/>
                 <a:cs typeface="Calibri" pitchFamily="34" charset="-120"/>
               </a:rPr>
-              <a:t>“The pass ahead is three days away.”</a:t>
+              <a:t>“Pick up your packs.”</a:t>
             </a:r>
             <a:endParaRPr lang="en-US" sz="2600" dirty="0"/>
           </a:p>
@@ -8109,7 +8109,7 @@
                 <a:ea typeface="Calibri" pitchFamily="34" charset="-122"/>
                 <a:cs typeface="Calibri" pitchFamily="34" charset="-120"/>
               </a:rPr>
-              <a:t>“But think of the faces waiting at home”</a:t>
+              <a:t>“I have walked every mile beside you, and my feet are as blistered as yours.”</a:t>
             </a:r>
             <a:endParaRPr lang="en-US" sz="2600" dirty="0"/>
           </a:p>
@@ -8146,7 +8146,7 @@
                 <a:ea typeface="Calibri" pitchFamily="34" charset="-122"/>
                 <a:cs typeface="Calibri" pitchFamily="34" charset="-120"/>
               </a:rPr>
-              <a:t>“Pick up your packs.”</a:t>
+              <a:t>“But think of the faces waiting at home”</a:t>
             </a:r>
             <a:endParaRPr lang="en-US" sz="2600" dirty="0"/>
           </a:p>
@@ -9513,7 +9513,7 @@
                 <a:ea typeface="Calibri" pitchFamily="34" charset="-122"/>
                 <a:cs typeface="Calibri" pitchFamily="34" charset="-120"/>
               </a:rPr>
-              <a:t>Athens</a:t>
+              <a:t>Rome</a:t>
             </a:r>
             <a:endParaRPr lang="en-US" sz="2400" dirty="0"/>
           </a:p>
@@ -9550,7 +9550,7 @@
                 <a:ea typeface="Calibri" pitchFamily="34" charset="-122"/>
                 <a:cs typeface="Calibri" pitchFamily="34" charset="-120"/>
               </a:rPr>
-              <a:t>Sparta</a:t>
+              <a:t>Athens</a:t>
             </a:r>
             <a:endParaRPr lang="en-US" sz="2400" dirty="0"/>
           </a:p>
@@ -9624,7 +9624,7 @@
                 <a:ea typeface="Calibri" pitchFamily="34" charset="-122"/>
                 <a:cs typeface="Calibri" pitchFamily="34" charset="-120"/>
               </a:rPr>
-              <a:t>Rome</a:t>
+              <a:t>Sparta</a:t>
             </a:r>
             <a:endParaRPr lang="en-US" sz="2400" dirty="0"/>
           </a:p>
@@ -10599,7 +10599,7 @@
                 <a:ea typeface="Cambria" pitchFamily="34" charset="-122"/>
                 <a:cs typeface="Cambria" pitchFamily="34" charset="-120"/>
               </a:rPr>
-              <a:t>A   “I have walked every mile beside you, and my feet are as blistered as yours.”</a:t>
+              <a:t>C   “I have walked every mile beside you, and my feet are as blistered as yours.”</a:t>
             </a:r>
             <a:endParaRPr lang="en-US" sz="1800" dirty="0"/>
           </a:p>
@@ -11133,7 +11133,7 @@
                 <a:ea typeface="Calibri" pitchFamily="34" charset="-122"/>
                 <a:cs typeface="Calibri" pitchFamily="34" charset="-120"/>
               </a:rPr>
-              <a:t>Rome</a:t>
+              <a:t>Sparta</a:t>
             </a:r>
             <a:endParaRPr lang="en-US" sz="2400" dirty="0"/>
           </a:p>
@@ -11170,7 +11170,7 @@
                 <a:ea typeface="Calibri" pitchFamily="34" charset="-122"/>
                 <a:cs typeface="Calibri" pitchFamily="34" charset="-120"/>
               </a:rPr>
-              <a:t>Athens</a:t>
+              <a:t>Rome</a:t>
             </a:r>
             <a:endParaRPr lang="en-US" sz="2400" dirty="0"/>
           </a:p>
@@ -11207,7 +11207,7 @@
                 <a:ea typeface="Calibri" pitchFamily="34" charset="-122"/>
                 <a:cs typeface="Calibri" pitchFamily="34" charset="-120"/>
               </a:rPr>
-              <a:t>Sparta</a:t>
+              <a:t>Athens</a:t>
             </a:r>
             <a:endParaRPr lang="en-US" sz="2400" dirty="0"/>
           </a:p>
@@ -11646,7 +11646,7 @@
                 <a:ea typeface="Calibri" pitchFamily="34" charset="-122"/>
                 <a:cs typeface="Calibri" pitchFamily="34" charset="-120"/>
               </a:rPr>
-              <a:t>Senators</a:t>
+              <a:t>Scribes</a:t>
             </a:r>
             <a:endParaRPr lang="en-US" sz="2400" dirty="0"/>
           </a:p>
@@ -11720,7 +11720,7 @@
                 <a:ea typeface="Calibri" pitchFamily="34" charset="-122"/>
                 <a:cs typeface="Calibri" pitchFamily="34" charset="-120"/>
               </a:rPr>
-              <a:t>Spartans</a:t>
+              <a:t>Senators</a:t>
             </a:r>
             <a:endParaRPr lang="en-US" sz="2400" dirty="0"/>
           </a:p>
@@ -11757,7 +11757,7 @@
                 <a:ea typeface="Calibri" pitchFamily="34" charset="-122"/>
                 <a:cs typeface="Calibri" pitchFamily="34" charset="-120"/>
               </a:rPr>
-              <a:t>Scribes</a:t>
+              <a:t>Spartans</a:t>
             </a:r>
             <a:endParaRPr lang="en-US" sz="2400" dirty="0"/>
           </a:p>
@@ -12096,7 +12096,7 @@
                 <a:ea typeface="Cambria" pitchFamily="34" charset="-122"/>
                 <a:cs typeface="Cambria" pitchFamily="34" charset="-120"/>
               </a:rPr>
-              <a:t>A   Athens</a:t>
+              <a:t>B   Athens</a:t>
             </a:r>
             <a:endParaRPr lang="en-US" sz="1800" dirty="0"/>
           </a:p>
@@ -12617,7 +12617,7 @@
                 <a:ea typeface="Calibri" pitchFamily="34" charset="-122"/>
                 <a:cs typeface="Calibri" pitchFamily="34" charset="-120"/>
               </a:rPr>
-              <a:t>B   Athens</a:t>
+              <a:t>C   Athens</a:t>
             </a:r>
             <a:endParaRPr lang="en-US" sz="2200" dirty="0"/>
           </a:p>

--- a/decks/englang-rhetoric/englang-rhetoric_ch1_what-is-rhetoric.pptx
+++ b/decks/englang-rhetoric/englang-rhetoric_ch1_what-is-rhetoric.pptx
@@ -126,29 +126,29 @@
   <p:extLst>
     <p:ext uri="{521415D9-36F7-43E2-AB2F-B90AF26B5E84}">
       <p14:sectionLst xmlns:p14="http://schemas.microsoft.com/office/powerpoint/2010/main">
-        <p14:section name="Opening" id="{8accbe64-0347-af68-c524-cdc035e1d71e}">
+        <p14:section name="Opening" id="{9ad5a029-aae7-e970-3c0a-613c6fbb3cc9}">
           <p14:sldIdLst>
             <p14:sldId id="256"/>
           </p14:sldIdLst>
         </p14:section>
-        <p14:section name="Gate" id="{5e4adc01-1b8a-a959-0029-3291380e5876}">
+        <p14:section name="Gate" id="{af0b5856-d7e3-ae72-4fff-04220c808cfd}">
           <p14:sldIdLst>
             <p14:sldId id="257"/>
             <p14:sldId id="258"/>
           </p14:sldIdLst>
         </p14:section>
-        <p14:section name="Pre-teach" id="{50625ab5-b8b2-4ef2-0514-8c282b7e50ea}">
+        <p14:section name="Pre-teach" id="{7dac7846-1547-d3a1-fa88-99d855a9f983}">
           <p14:sldIdLst>
             <p14:sldId id="259"/>
           </p14:sldIdLst>
         </p14:section>
-        <p14:section name="Read-along" id="{a24e1f0c-7129-362d-9afb-7b99648d553e}">
+        <p14:section name="Read-along" id="{0483d3f7-b791-be1d-4d95-770c87e8b47e}">
           <p14:sldIdLst>
             <p14:sldId id="260"/>
             <p14:sldId id="261"/>
           </p14:sldIdLst>
         </p14:section>
-        <p14:section name="Teach" id="{d7621298-347e-9a6e-5ee4-621d3567160d}">
+        <p14:section name="Teach" id="{2b0e8c7c-9fc3-bdff-f149-1a00053647ba}">
           <p14:sldIdLst>
             <p14:sldId id="262"/>
             <p14:sldId id="263"/>
@@ -158,7 +158,7 @@
             <p14:sldId id="267"/>
           </p14:sldIdLst>
         </p14:section>
-        <p14:section name="Routes" id="{46c7adf8-f09e-8d17-51aa-c2e77068d6f4}">
+        <p14:section name="Routes" id="{36c1596a-5a9e-169d-ac35-36a9e697afb4}">
           <p14:sldIdLst>
             <p14:sldId id="268"/>
             <p14:sldId id="269"/>
@@ -166,12 +166,12 @@
             <p14:sldId id="271"/>
           </p14:sldIdLst>
         </p14:section>
-        <p14:section name="Close" id="{244fd864-26ae-3294-ded1-9c4e484a7cd5}">
+        <p14:section name="Close" id="{6d78b499-7299-81a3-7328-829a09ced4dc}">
           <p14:sldIdLst>
             <p14:sldId id="272"/>
           </p14:sldIdLst>
         </p14:section>
-        <p14:section name="Answers" id="{754395ec-d05b-fc86-fb10-a4031b693724}">
+        <p14:section name="Answers" id="{08c7643f-3dd8-3f8c-a764-31b0969efb8b}">
           <p14:sldIdLst>
             <p14:sldId id="273"/>
             <p14:sldId id="274"/>
